--- a/public/fun/pack/pptx/weddingpro/결혼식프리미엄_31_소개중심_머스터드네이비.pptx
+++ b/public/fun/pack/pptx/weddingpro/결혼식프리미엄_31_소개중심_머스터드네이비.pptx
@@ -113,12 +113,12 @@
   <p:extLst>
     <p:ext uri="{521415D9-36F7-43E2-AB2F-B90AF26B5E84}">
       <p14:sectionLst xmlns:p14="http://schemas.microsoft.com/office/powerpoint/2010/main">
-        <p14:section name="시작" id="{D71D6D6B-FAA3-423D-8AE8-21B89240EF2F}">
+        <p14:section name="시작" id="{8A1946B3-23E2-40BD-B819-82C6B15E82E6}">
           <p14:sldIdLst>
             <p14:sldId id="256"/>
           </p14:sldIdLst>
         </p14:section>
-        <p14:section name="본문" id="{4B02E3BE-91E9-4663-A068-02C8DB69FED8}">
+        <p14:section name="본문" id="{7778BD7F-804D-4164-9AAD-D0EDBDCD06E0}">
           <p14:sldIdLst>
             <p14:sldId id="257"/>
             <p14:sldId id="258"/>
@@ -127,7 +127,7 @@
             <p14:sldId id="261"/>
           </p14:sldIdLst>
         </p14:section>
-        <p14:section name="마무리" id="{7006D9C9-08E1-4A4C-9A8B-D7BFA3E46CF2}">
+        <p14:section name="마무리" id="{E874015C-D498-4F7C-9493-3E97C1E73940}">
           <p14:sldIdLst>
             <p14:sldId id="262"/>
           </p14:sldIdLst>
@@ -1578,7 +1578,7 @@
             </a:lvl1pPr>
           </a:lstStyle>
           <a:p>
-            <a:fld id="{6889120C-BDAA-411E-8AFC-51D8DDA93EF4}" type="slidenum">
+            <a:fld id="{6B368D3E-DE6E-460E-B2C9-1D39A3944513}" type="slidenum">
               <a:rPr lang="en-US"/>
               <a:t>‹#›</a:t>
             </a:fld>
@@ -2291,7 +2291,7 @@
             </a:lvl1pPr>
           </a:lstStyle>
           <a:p>
-            <a:fld id="{FFB8BD3B-4AF5-4105-B3EB-D69261FAE765}" type="slidenum">
+            <a:fld id="{2992FCCB-F73D-4BAB-A836-3E4C9297AB44}" type="slidenum">
               <a:rPr lang="en-US"/>
               <a:t>‹#›</a:t>
             </a:fld>
@@ -2972,7 +2972,7 @@
             </a:lvl1pPr>
           </a:lstStyle>
           <a:p>
-            <a:fld id="{80B27160-5682-43B6-8320-C35C51C4E078}" type="slidenum">
+            <a:fld id="{03F2A12E-CEC9-4169-B0D4-FC145C4453A1}" type="slidenum">
               <a:rPr lang="en-US"/>
               <a:t>‹#›</a:t>
             </a:fld>
@@ -3841,7 +3841,7 @@
           <a:p>
             <a:r>
               <a:rPr lang="ko-KR"/>
-              <a:t>0000. 00. 00 · 예식장 이름</a:t>
+              <a:t>날짜 입력 · 예식장 이름</a:t>
             </a:r>
           </a:p>
         </p:txBody>
@@ -4064,7 +4064,7 @@
           <a:bodyPr/>
           <a:lstStyle/>
           <a:p>
-            <a:fld id="{95651C81-803F-49C5-A2C9-2A7E2C97191B}" type="slidenum">
+            <a:fld id="{4AD72A5D-3639-45C3-97A9-A77B4AA7F928}" type="slidenum">
               <a:rPr lang="en-US"/>
               <a:t>‹#›</a:t>
             </a:fld>
@@ -4466,7 +4466,7 @@
           <a:bodyPr/>
           <a:lstStyle/>
           <a:p>
-            <a:fld id="{59884D1E-5A9E-4AC0-AABB-DFB36CDEB94B}" type="slidenum">
+            <a:fld id="{196E15FF-9129-4E21-8461-DDB2CF9FED0B}" type="slidenum">
               <a:rPr lang="en-US"/>
               <a:t>‹#›</a:t>
             </a:fld>
@@ -5064,7 +5064,7 @@
           <a:bodyPr/>
           <a:lstStyle/>
           <a:p>
-            <a:fld id="{7BDCA31C-E052-4F1D-AF5A-F3C04F7F5B77}" type="slidenum">
+            <a:fld id="{C6BB8943-7939-48BD-9FF9-44692202AF3B}" type="slidenum">
               <a:rPr lang="en-US"/>
               <a:t>‹#›</a:t>
             </a:fld>
@@ -5990,7 +5990,7 @@
           <a:bodyPr/>
           <a:lstStyle/>
           <a:p>
-            <a:fld id="{748D8711-3D2C-4617-A5D1-548172A3B1E9}" type="slidenum">
+            <a:fld id="{7710EBFA-1DA9-4C2A-A1F5-49A72E0E53A9}" type="slidenum">
               <a:rPr lang="en-US"/>
               <a:t>‹#›</a:t>
             </a:fld>
@@ -6078,7 +6078,7 @@
           <a:bodyPr/>
           <a:lstStyle/>
           <a:p>
-            <a:fld id="{F93CC820-3CC6-4E1F-BD4E-BE9C77C0350C}" type="slidenum">
+            <a:fld id="{C392C9CD-EDDE-49CF-B56E-079D6150264B}" type="slidenum">
               <a:rPr lang="en-US"/>
               <a:t>‹#›</a:t>
             </a:fld>
